--- a/praesentationen/input-03-azure-aufbau.pptx
+++ b/praesentationen/input-03-azure-aufbau.pptx
@@ -120,7 +120,7 @@
   <p:extLst>
     <p:ext uri="{521415D9-36F7-43E2-AB2F-B90AF26B5E84}">
       <p14:sectionLst xmlns:p14="http://schemas.microsoft.com/office/powerpoint/2010/main">
-        <p14:section name="Aufbau" id="{df559f5b-e486-5972-175b-fe46f0c30714}">
+        <p14:section name="Aufbau" id="{710aa5dc-a20b-b5cf-76e6-e8740a6ad660}">
           <p14:sldIdLst>
             <p14:sldId id="256"/>
             <p14:sldId id="257"/>
@@ -130,7 +130,7 @@
             <p14:sldId id="261"/>
           </p14:sldIdLst>
         </p14:section>
-        <p14:section name="Werkzeuge" id="{fa0a7fd9-97bf-3866-de70-d5f066a54b76}">
+        <p14:section name="Werkzeuge" id="{7f7cdcdb-08fd-5aab-c4a3-1b57ac5ffd35}">
           <p14:sldIdLst>
             <p14:sldId id="262"/>
             <p14:sldId id="263"/>

--- a/praesentationen/input-03-azure-aufbau.pptx
+++ b/praesentationen/input-03-azure-aufbau.pptx
@@ -120,7 +120,7 @@
   <p:extLst>
     <p:ext uri="{521415D9-36F7-43E2-AB2F-B90AF26B5E84}">
       <p14:sectionLst xmlns:p14="http://schemas.microsoft.com/office/powerpoint/2010/main">
-        <p14:section name="Aufbau" id="{710aa5dc-a20b-b5cf-76e6-e8740a6ad660}">
+        <p14:section name="Aufbau" id="{142eee3c-39fc-afcb-a6ee-9fbd2a84b7d1}">
           <p14:sldIdLst>
             <p14:sldId id="256"/>
             <p14:sldId id="257"/>
@@ -130,7 +130,7 @@
             <p14:sldId id="261"/>
           </p14:sldIdLst>
         </p14:section>
-        <p14:section name="Werkzeuge" id="{7f7cdcdb-08fd-5aab-c4a3-1b57ac5ffd35}">
+        <p14:section name="Werkzeuge" id="{38ff2890-2ee3-2b51-21d7-81ad298e824d}">
           <p14:sldIdLst>
             <p14:sldId id="262"/>
             <p14:sldId id="263"/>
@@ -3894,7 +3894,7 @@
                   <a:srgbClr val="27303A"/>
                 </a:solidFill>
               </a:rPr>
-              <a:t>RBAC</a:t>
+              <a:t>Rollen (RBAC)</a:t>
             </a:r>
             <a:endParaRPr lang="en-US" sz="2200" dirty="0"/>
           </a:p>
@@ -4158,7 +4158,7 @@
                   <a:srgbClr val="27303A"/>
                 </a:solidFill>
               </a:rPr>
-              <a:t>Conditional Access in Entra ID</a:t>
+              <a:t>auf Englisch: Conditional Access</a:t>
             </a:r>
             <a:endParaRPr lang="en-US" sz="1800" dirty="0"/>
           </a:p>
@@ -5312,7 +5312,7 @@
                   <a:srgbClr val="27303A"/>
                 </a:solidFill>
               </a:rPr>
-              <a:t>Regionen und Verfügbarkeitszonen</a:t>
+              <a:t>Regionen und Verfügbarkeitszonen (Availability Zones)</a:t>
             </a:r>
             <a:endParaRPr lang="en-US" sz="3400" dirty="0"/>
           </a:p>
@@ -5320,7 +5320,7 @@
       </p:sp>
       <p:pic>
         <p:nvPicPr>
-          <p:cNvPr id="3" name="diagramm" descr="Regionen und Verfügbarkeitszonen">    </p:cNvPr>
+          <p:cNvPr id="3" name="diagramm" descr="Regionen und Verfügbarkeitszonen (Availability Zones)">    </p:cNvPr>
           <p:cNvPicPr>
             <a:picLocks noChangeAspect="1"/>
           </p:cNvPicPr>
@@ -6047,7 +6047,7 @@
                   <a:srgbClr val="27303A"/>
                 </a:solidFill>
               </a:rPr>
-              <a:t>Vom Mandanten bis zur Ressource</a:t>
+              <a:t>Vom Mandanten (Tenant) bis zur Ressource</a:t>
             </a:r>
             <a:endParaRPr lang="en-US" sz="3400" dirty="0"/>
           </a:p>
@@ -6055,7 +6055,7 @@
       </p:sp>
       <p:pic>
         <p:nvPicPr>
-          <p:cNvPr id="3" name="diagramm" descr="Vom Mandanten bis zur Ressource">    </p:cNvPr>
+          <p:cNvPr id="3" name="diagramm" descr="Vom Mandanten (Tenant) bis zur Ressource">    </p:cNvPr>
           <p:cNvPicPr>
             <a:picLocks noChangeAspect="1"/>
           </p:cNvPicPr>
@@ -6179,7 +6179,7 @@
                   <a:srgbClr val="27303A"/>
                 </a:solidFill>
               </a:rPr>
-              <a:t>Die Ressourcengruppe</a:t>
+              <a:t>Die Ressourcengruppe (Resource Group)</a:t>
             </a:r>
             <a:endParaRPr lang="en-US" sz="3400" dirty="0"/>
           </a:p>

--- a/praesentationen/input-03-azure-aufbau.pptx
+++ b/praesentationen/input-03-azure-aufbau.pptx
@@ -120,7 +120,7 @@
   <p:extLst>
     <p:ext uri="{521415D9-36F7-43E2-AB2F-B90AF26B5E84}">
       <p14:sectionLst xmlns:p14="http://schemas.microsoft.com/office/powerpoint/2010/main">
-        <p14:section name="Aufbau" id="{142eee3c-39fc-afcb-a6ee-9fbd2a84b7d1}">
+        <p14:section name="Aufbau" id="{eff2c0c5-6cf5-24b0-99cc-a231a4e9e5ac}">
           <p14:sldIdLst>
             <p14:sldId id="256"/>
             <p14:sldId id="257"/>
@@ -130,7 +130,7 @@
             <p14:sldId id="261"/>
           </p14:sldIdLst>
         </p14:section>
-        <p14:section name="Werkzeuge" id="{38ff2890-2ee3-2b51-21d7-81ad298e824d}">
+        <p14:section name="Werkzeuge" id="{352924c6-f5d5-1898-9067-3fcd208410ee}">
           <p14:sldIdLst>
             <p14:sldId id="262"/>
             <p14:sldId id="263"/>
@@ -1768,7 +1768,7 @@
     <p:bg>
       <p:bgPr>
         <a:solidFill>
-          <a:srgbClr val="27303A"/>
+          <a:srgbClr val="FFFFFF"/>
         </a:solidFill>
       </p:bgPr>
     </p:bg>
@@ -1788,7 +1788,7 @@
       </p:grpSpPr>
       <p:pic>
         <p:nvPicPr>
-          <p:cNvPr id="2" name="Image 0" descr="C:\Users\Thanam\AppData\Local\Temp\claude\c--Projekt-Trainings-azure-basics-training\a9e0bf4e-0d08-4082-a38a-5b8886538508\scratchpad\pptx\assets\logo-hell.png">    </p:cNvPr>
+          <p:cNvPr id="2" name="Image 0" descr="C:\Users\Thanam\AppData\Local\Temp\claude\c--Projekt-Trainings-azure-basics-training\a7a6b8eb-22f3-4b42-aecc-5af05d1502b1\scratchpad\folien\assets\logo-dunkel.png">    </p:cNvPr>
           <p:cNvPicPr>
             <a:picLocks noChangeAspect="1"/>
           </p:cNvPicPr>
@@ -1812,7 +1812,7 @@
       </p:pic>
       <p:pic>
         <p:nvPicPr>
-          <p:cNvPr id="3" name="Image 1" descr="C:\Users\Thanam\AppData\Local\Temp\claude\c--Projekt-Trainings-azure-basics-training\a9e0bf4e-0d08-4082-a38a-5b8886538508\scratchpad\pptx\assets\wolke.png">    </p:cNvPr>
+          <p:cNvPr id="3" name="Image 1" descr="C:\Users\Thanam\AppData\Local\Temp\claude\c--Projekt-Trainings-azure-basics-training\a7a6b8eb-22f3-4b42-aecc-5af05d1502b1\scratchpad\folien\assets\wolke.png">    </p:cNvPr>
           <p:cNvPicPr>
             <a:picLocks noChangeAspect="1"/>
           </p:cNvPicPr>
@@ -1860,7 +1860,7 @@
               <a:buNone/>
               <a:defRPr lang="en-US" sz="4400" b="1" dirty="0">
                 <a:solidFill>
-                  <a:srgbClr val="FFFFFF"/>
+                  <a:srgbClr val="27303A"/>
                 </a:solidFill>
               </a:defRPr>
             </a:lvl1pPr>
@@ -1899,7 +1899,7 @@
               <a:buNone/>
               <a:defRPr lang="en-US" sz="2000" dirty="0">
                 <a:solidFill>
-                  <a:srgbClr val="DEE2FB"/>
+                  <a:srgbClr val="006FAD"/>
                 </a:solidFill>
               </a:defRPr>
             </a:lvl1pPr>
@@ -1939,7 +1939,7 @@
             <a:r>
               <a:rPr lang="en-US" sz="1200" dirty="0">
                 <a:solidFill>
-                  <a:srgbClr val="DEE2FB"/>
+                  <a:srgbClr val="6F6F6F"/>
                 </a:solidFill>
               </a:rPr>
               <a:t>Kanton Zürich · ICT-Grundbildung · PAT Cloud Solutions</a:t>
@@ -1962,7 +1962,7 @@
     <p:bg>
       <p:bgPr>
         <a:solidFill>
-          <a:srgbClr val="006FAD"/>
+          <a:srgbClr val="F7F7F7"/>
         </a:solidFill>
       </p:bgPr>
     </p:bg>
@@ -1982,7 +1982,7 @@
       </p:grpSpPr>
       <p:pic>
         <p:nvPicPr>
-          <p:cNvPr id="2" name="Image 0" descr="C:\Users\Thanam\AppData\Local\Temp\claude\c--Projekt-Trainings-azure-basics-training\a9e0bf4e-0d08-4082-a38a-5b8886538508\scratchpad\pptx\assets\wolke.png">    </p:cNvPr>
+          <p:cNvPr id="2" name="Image 0" descr="C:\Users\Thanam\AppData\Local\Temp\claude\c--Projekt-Trainings-azure-basics-training\a7a6b8eb-22f3-4b42-aecc-5af05d1502b1\scratchpad\folien\assets\wolke.png">    </p:cNvPr>
           <p:cNvPicPr>
             <a:picLocks noChangeAspect="1"/>
           </p:cNvPicPr>
@@ -2006,7 +2006,7 @@
       </p:pic>
       <p:pic>
         <p:nvPicPr>
-          <p:cNvPr id="3" name="Image 1" descr="C:\Users\Thanam\AppData\Local\Temp\claude\c--Projekt-Trainings-azure-basics-training\a9e0bf4e-0d08-4082-a38a-5b8886538508\scratchpad\pptx\assets\logo-hell.png">    </p:cNvPr>
+          <p:cNvPr id="3" name="Image 1" descr="C:\Users\Thanam\AppData\Local\Temp\claude\c--Projekt-Trainings-azure-basics-training\a7a6b8eb-22f3-4b42-aecc-5af05d1502b1\scratchpad\folien\assets\logo-dunkel.png">    </p:cNvPr>
           <p:cNvPicPr>
             <a:picLocks noChangeAspect="1"/>
           </p:cNvPicPr>
@@ -2054,7 +2054,7 @@
               <a:buNone/>
               <a:defRPr lang="en-US" sz="4000" b="1" dirty="0">
                 <a:solidFill>
-                  <a:srgbClr val="FFFFFF"/>
+                  <a:srgbClr val="27303A"/>
                 </a:solidFill>
               </a:defRPr>
             </a:lvl1pPr>
@@ -2093,7 +2093,7 @@
               <a:buNone/>
               <a:defRPr lang="en-US" sz="2000" dirty="0">
                 <a:solidFill>
-                  <a:srgbClr val="DEE2FB"/>
+                  <a:srgbClr val="006FAD"/>
                 </a:solidFill>
               </a:defRPr>
             </a:lvl1pPr>
@@ -2140,7 +2140,7 @@
       </p:grpSpPr>
       <p:pic>
         <p:nvPicPr>
-          <p:cNvPr id="2" name="Image 0" descr="C:\Users\Thanam\AppData\Local\Temp\claude\c--Projekt-Trainings-azure-basics-training\a9e0bf4e-0d08-4082-a38a-5b8886538508\scratchpad\pptx\assets\logo-dunkel.png">    </p:cNvPr>
+          <p:cNvPr id="2" name="Image 0" descr="C:\Users\Thanam\AppData\Local\Temp\claude\c--Projekt-Trainings-azure-basics-training\a7a6b8eb-22f3-4b42-aecc-5af05d1502b1\scratchpad\folien\assets\logo-dunkel.png">    </p:cNvPr>
           <p:cNvPicPr>
             <a:picLocks noChangeAspect="1"/>
           </p:cNvPicPr>
@@ -2296,7 +2296,7 @@
     <p:bg>
       <p:bgPr>
         <a:solidFill>
-          <a:srgbClr val="27303A"/>
+          <a:srgbClr val="FFFFFF"/>
         </a:solidFill>
       </p:bgPr>
     </p:bg>
@@ -2316,7 +2316,7 @@
       </p:grpSpPr>
       <p:pic>
         <p:nvPicPr>
-          <p:cNvPr id="2" name="Image 0" descr="C:\Users\Thanam\AppData\Local\Temp\claude\c--Projekt-Trainings-azure-basics-training\a9e0bf4e-0d08-4082-a38a-5b8886538508\scratchpad\pptx\assets\logo-hell.png">    </p:cNvPr>
+          <p:cNvPr id="2" name="Image 0" descr="C:\Users\Thanam\AppData\Local\Temp\claude\c--Projekt-Trainings-azure-basics-training\a7a6b8eb-22f3-4b42-aecc-5af05d1502b1\scratchpad\folien\assets\logo-dunkel.png">    </p:cNvPr>
           <p:cNvPicPr>
             <a:picLocks noChangeAspect="1"/>
           </p:cNvPicPr>
@@ -2364,7 +2364,7 @@
               <a:buNone/>
               <a:defRPr lang="en-US" sz="4000" b="1" dirty="0">
                 <a:solidFill>
-                  <a:srgbClr val="FFFFFF"/>
+                  <a:srgbClr val="27303A"/>
                 </a:solidFill>
               </a:defRPr>
             </a:lvl1pPr>
@@ -2403,7 +2403,7 @@
               <a:buNone/>
               <a:defRPr lang="en-US" sz="2000" dirty="0">
                 <a:solidFill>
-                  <a:srgbClr val="DEE2FB"/>
+                  <a:srgbClr val="006FAD"/>
                 </a:solidFill>
               </a:defRPr>
             </a:lvl1pPr>
@@ -2796,7 +2796,7 @@
             <a:r>
               <a:rPr lang="en-US" sz="4400" b="1" dirty="0">
                 <a:solidFill>
-                  <a:srgbClr val="FFFFFF"/>
+                  <a:srgbClr val="27303A"/>
                 </a:solidFill>
               </a:rPr>
               <a:t>Aufbau von Azure</a:t>
@@ -2834,7 +2834,7 @@
             <a:r>
               <a:rPr lang="en-US" sz="2000" dirty="0">
                 <a:solidFill>
-                  <a:srgbClr val="DEE2FB"/>
+                  <a:srgbClr val="006FAD"/>
                 </a:solidFill>
               </a:rPr>
               <a:t>Input 2 und 3 · Tag 2</a:t>
@@ -3842,7 +3842,7 @@
       </p:sp>
       <p:pic>
         <p:nvPicPr>
-          <p:cNvPr id="5" name="icon-FaUserShield" descr="C:\Users\Thanam\AppData\Local\Temp\claude\c--Projekt-Trainings-azure-basics-training\a9e0bf4e-0d08-4082-a38a-5b8886538508\scratchpad\pptx\assets\icons\FaUserShield.png">    </p:cNvPr>
+          <p:cNvPr id="5" name="icon-FaUserShield" descr="C:\Users\Thanam\AppData\Local\Temp\claude\c--Projekt-Trainings-azure-basics-training\a7a6b8eb-22f3-4b42-aecc-5af05d1502b1\scratchpad\folien\assets\icons\FaUserShield.png">    </p:cNvPr>
           <p:cNvPicPr>
             <a:picLocks noChangeAspect="1"/>
           </p:cNvPicPr>
@@ -4030,7 +4030,7 @@
       </p:sp>
       <p:pic>
         <p:nvPicPr>
-          <p:cNvPr id="10" name="icon-FaLock" descr="C:\Users\Thanam\AppData\Local\Temp\claude\c--Projekt-Trainings-azure-basics-training\a9e0bf4e-0d08-4082-a38a-5b8886538508\scratchpad\pptx\assets\icons\FaLock.png">    </p:cNvPr>
+          <p:cNvPr id="10" name="icon-FaLock" descr="C:\Users\Thanam\AppData\Local\Temp\claude\c--Projekt-Trainings-azure-basics-training\a7a6b8eb-22f3-4b42-aecc-5af05d1502b1\scratchpad\folien\assets\icons\FaLock.png">    </p:cNvPr>
           <p:cNvPicPr>
             <a:picLocks noChangeAspect="1"/>
           </p:cNvPicPr>
@@ -4398,7 +4398,7 @@
       </p:sp>
       <p:pic>
         <p:nvPicPr>
-          <p:cNvPr id="6" name="icon-FaQuestionCircle" descr="C:\Users\Thanam\AppData\Local\Temp\claude\c--Projekt-Trainings-azure-basics-training\a9e0bf4e-0d08-4082-a38a-5b8886538508\scratchpad\pptx\assets\icons\FaQuestionCircle.png">    </p:cNvPr>
+          <p:cNvPr id="6" name="icon-FaQuestionCircle" descr="C:\Users\Thanam\AppData\Local\Temp\claude\c--Projekt-Trainings-azure-basics-training\a7a6b8eb-22f3-4b42-aecc-5af05d1502b1\scratchpad\folien\assets\icons\FaQuestionCircle.png">    </p:cNvPr>
           <p:cNvPicPr>
             <a:picLocks noChangeAspect="1"/>
           </p:cNvPicPr>
@@ -4551,7 +4551,7 @@
       </p:sp>
       <p:pic>
         <p:nvPicPr>
-          <p:cNvPr id="11" name="icon-FaQuestionCircle" descr="C:\Users\Thanam\AppData\Local\Temp\claude\c--Projekt-Trainings-azure-basics-training\a9e0bf4e-0d08-4082-a38a-5b8886538508\scratchpad\pptx\assets\icons\FaQuestionCircle.png">    </p:cNvPr>
+          <p:cNvPr id="11" name="icon-FaQuestionCircle" descr="C:\Users\Thanam\AppData\Local\Temp\claude\c--Projekt-Trainings-azure-basics-training\a7a6b8eb-22f3-4b42-aecc-5af05d1502b1\scratchpad\folien\assets\icons\FaQuestionCircle.png">    </p:cNvPr>
           <p:cNvPicPr>
             <a:picLocks noChangeAspect="1"/>
           </p:cNvPicPr>
@@ -4704,7 +4704,7 @@
       </p:sp>
       <p:pic>
         <p:nvPicPr>
-          <p:cNvPr id="16" name="icon-FaQuestionCircle" descr="C:\Users\Thanam\AppData\Local\Temp\claude\c--Projekt-Trainings-azure-basics-training\a9e0bf4e-0d08-4082-a38a-5b8886538508\scratchpad\pptx\assets\icons\FaQuestionCircle.png">    </p:cNvPr>
+          <p:cNvPr id="16" name="icon-FaQuestionCircle" descr="C:\Users\Thanam\AppData\Local\Temp\claude\c--Projekt-Trainings-azure-basics-training\a7a6b8eb-22f3-4b42-aecc-5af05d1502b1\scratchpad\folien\assets\icons\FaQuestionCircle.png">    </p:cNvPr>
           <p:cNvPicPr>
             <a:picLocks noChangeAspect="1"/>
           </p:cNvPicPr>
@@ -4938,7 +4938,7 @@
       </p:sp>
       <p:pic>
         <p:nvPicPr>
-          <p:cNvPr id="4" name="icon-FaBook" descr="C:\Users\Thanam\AppData\Local\Temp\claude\c--Projekt-Trainings-azure-basics-training\a9e0bf4e-0d08-4082-a38a-5b8886538508\scratchpad\pptx\assets\icons\FaBook.png">    </p:cNvPr>
+          <p:cNvPr id="4" name="icon-FaBook" descr="C:\Users\Thanam\AppData\Local\Temp\claude\c--Projekt-Trainings-azure-basics-training\a7a6b8eb-22f3-4b42-aecc-5af05d1502b1\scratchpad\folien\assets\icons\FaBook.png">    </p:cNvPr>
           <p:cNvPicPr>
             <a:picLocks noChangeAspect="1"/>
           </p:cNvPicPr>
@@ -5037,7 +5037,7 @@
       </p:sp>
       <p:pic>
         <p:nvPicPr>
-          <p:cNvPr id="7" name="icon-FaGraduationCap" descr="C:\Users\Thanam\AppData\Local\Temp\claude\c--Projekt-Trainings-azure-basics-training\a9e0bf4e-0d08-4082-a38a-5b8886538508\scratchpad\pptx\assets\icons\FaGraduationCap.png">    </p:cNvPr>
+          <p:cNvPr id="7" name="icon-FaGraduationCap" descr="C:\Users\Thanam\AppData\Local\Temp\claude\c--Projekt-Trainings-azure-basics-training\a7a6b8eb-22f3-4b42-aecc-5af05d1502b1\scratchpad\folien\assets\icons\FaGraduationCap.png">    </p:cNvPr>
           <p:cNvPicPr>
             <a:picLocks noChangeAspect="1"/>
           </p:cNvPicPr>
@@ -5208,7 +5208,7 @@
             <a:r>
               <a:rPr lang="en-US" sz="4000" b="1" dirty="0">
                 <a:solidFill>
-                  <a:srgbClr val="FFFFFF"/>
+                  <a:srgbClr val="27303A"/>
                 </a:solidFill>
               </a:rPr>
               <a:t>Jetzt du</a:t>
@@ -5246,7 +5246,7 @@
             <a:r>
               <a:rPr lang="en-US" sz="2000" dirty="0">
                 <a:solidFill>
-                  <a:srgbClr val="DEE2FB"/>
+                  <a:srgbClr val="006FAD"/>
                 </a:solidFill>
               </a:rPr>
               <a:t>Auftrag 2.2–2.4: Abonnement erkunden, Ressourcengruppe im Portal und mit der CLI</a:t>
@@ -5504,7 +5504,7 @@
       </p:sp>
       <p:pic>
         <p:nvPicPr>
-          <p:cNvPr id="5" name="icon-FaBolt" descr="C:\Users\Thanam\AppData\Local\Temp\claude\c--Projekt-Trainings-azure-basics-training\a9e0bf4e-0d08-4082-a38a-5b8886538508\scratchpad\pptx\assets\icons\FaBolt.png">    </p:cNvPr>
+          <p:cNvPr id="5" name="icon-FaBolt" descr="C:\Users\Thanam\AppData\Local\Temp\claude\c--Projekt-Trainings-azure-basics-training\a7a6b8eb-22f3-4b42-aecc-5af05d1502b1\scratchpad\folien\assets\icons\FaBolt.png">    </p:cNvPr>
           <p:cNvPicPr>
             <a:picLocks noChangeAspect="1"/>
           </p:cNvPicPr>
@@ -5657,7 +5657,7 @@
       </p:sp>
       <p:pic>
         <p:nvPicPr>
-          <p:cNvPr id="10" name="icon-FaShieldAlt" descr="C:\Users\Thanam\AppData\Local\Temp\claude\c--Projekt-Trainings-azure-basics-training\a9e0bf4e-0d08-4082-a38a-5b8886538508\scratchpad\pptx\assets\icons\FaShieldAlt.png">    </p:cNvPr>
+          <p:cNvPr id="10" name="icon-FaShieldAlt" descr="C:\Users\Thanam\AppData\Local\Temp\claude\c--Projekt-Trainings-azure-basics-training\a7a6b8eb-22f3-4b42-aecc-5af05d1502b1\scratchpad\folien\assets\icons\FaShieldAlt.png">    </p:cNvPr>
           <p:cNvPicPr>
             <a:picLocks noChangeAspect="1"/>
           </p:cNvPicPr>
@@ -5810,7 +5810,7 @@
       </p:sp>
       <p:pic>
         <p:nvPicPr>
-          <p:cNvPr id="15" name="icon-FaCoins" descr="C:\Users\Thanam\AppData\Local\Temp\claude\c--Projekt-Trainings-azure-basics-training\a9e0bf4e-0d08-4082-a38a-5b8886538508\scratchpad\pptx\assets\icons\FaCoins.png">    </p:cNvPr>
+          <p:cNvPr id="15" name="icon-FaCoins" descr="C:\Users\Thanam\AppData\Local\Temp\claude\c--Projekt-Trainings-azure-basics-training\a7a6b8eb-22f3-4b42-aecc-5af05d1502b1\scratchpad\folien\assets\icons\FaCoins.png">    </p:cNvPr>
           <p:cNvPicPr>
             <a:picLocks noChangeAspect="1"/>
           </p:cNvPicPr>
@@ -6239,7 +6239,7 @@
       </p:sp>
       <p:pic>
         <p:nvPicPr>
-          <p:cNvPr id="5" name="icon-FaFolderOpen" descr="C:\Users\Thanam\AppData\Local\Temp\claude\c--Projekt-Trainings-azure-basics-training\a9e0bf4e-0d08-4082-a38a-5b8886538508\scratchpad\pptx\assets\icons\FaFolderOpen.png">    </p:cNvPr>
+          <p:cNvPr id="5" name="icon-FaFolderOpen" descr="C:\Users\Thanam\AppData\Local\Temp\claude\c--Projekt-Trainings-azure-basics-training\a7a6b8eb-22f3-4b42-aecc-5af05d1502b1\scratchpad\folien\assets\icons\FaFolderOpen.png">    </p:cNvPr>
           <p:cNvPicPr>
             <a:picLocks noChangeAspect="1"/>
           </p:cNvPicPr>
@@ -6392,7 +6392,7 @@
       </p:sp>
       <p:pic>
         <p:nvPicPr>
-          <p:cNvPr id="10" name="icon-FaTrashAlt" descr="C:\Users\Thanam\AppData\Local\Temp\claude\c--Projekt-Trainings-azure-basics-training\a9e0bf4e-0d08-4082-a38a-5b8886538508\scratchpad\pptx\assets\icons\FaTrashAlt.png">    </p:cNvPr>
+          <p:cNvPr id="10" name="icon-FaTrashAlt" descr="C:\Users\Thanam\AppData\Local\Temp\claude\c--Projekt-Trainings-azure-basics-training\a7a6b8eb-22f3-4b42-aecc-5af05d1502b1\scratchpad\folien\assets\icons\FaTrashAlt.png">    </p:cNvPr>
           <p:cNvPicPr>
             <a:picLocks noChangeAspect="1"/>
           </p:cNvPicPr>
@@ -6545,7 +6545,7 @@
       </p:sp>
       <p:pic>
         <p:nvPicPr>
-          <p:cNvPr id="15" name="icon-FaClipboardList" descr="C:\Users\Thanam\AppData\Local\Temp\claude\c--Projekt-Trainings-azure-basics-training\a9e0bf4e-0d08-4082-a38a-5b8886538508\scratchpad\pptx\assets\icons\FaClipboardList.png">    </p:cNvPr>
+          <p:cNvPr id="15" name="icon-FaClipboardList" descr="C:\Users\Thanam\AppData\Local\Temp\claude\c--Projekt-Trainings-azure-basics-training\a7a6b8eb-22f3-4b42-aecc-5af05d1502b1\scratchpad\folien\assets\icons\FaClipboardList.png">    </p:cNvPr>
           <p:cNvPicPr>
             <a:picLocks noChangeAspect="1"/>
           </p:cNvPicPr>
@@ -6875,7 +6875,7 @@
             <a:r>
               <a:rPr lang="en-US" sz="4000" b="1" dirty="0">
                 <a:solidFill>
-                  <a:srgbClr val="FFFFFF"/>
+                  <a:srgbClr val="27303A"/>
                 </a:solidFill>
               </a:rPr>
               <a:t>Cloud Shell und Azure CLI</a:t>
@@ -6913,7 +6913,7 @@
             <a:r>
               <a:rPr lang="en-US" sz="2000" dirty="0">
                 <a:solidFill>
-                  <a:srgbClr val="DEE2FB"/>
+                  <a:srgbClr val="006FAD"/>
                 </a:solidFill>
               </a:rPr>
               <a:t>Input 3 · Tag 2</a:t>
@@ -7039,7 +7039,7 @@
       </p:sp>
       <p:pic>
         <p:nvPicPr>
-          <p:cNvPr id="5" name="icon-FaGlobeEurope" descr="C:\Users\Thanam\AppData\Local\Temp\claude\c--Projekt-Trainings-azure-basics-training\a9e0bf4e-0d08-4082-a38a-5b8886538508\scratchpad\pptx\assets\icons\FaGlobeEurope.png">    </p:cNvPr>
+          <p:cNvPr id="5" name="icon-FaGlobeEurope" descr="C:\Users\Thanam\AppData\Local\Temp\claude\c--Projekt-Trainings-azure-basics-training\a7a6b8eb-22f3-4b42-aecc-5af05d1502b1\scratchpad\folien\assets\icons\FaGlobeEurope.png">    </p:cNvPr>
           <p:cNvPicPr>
             <a:picLocks noChangeAspect="1"/>
           </p:cNvPicPr>
@@ -7192,7 +7192,7 @@
       </p:sp>
       <p:pic>
         <p:nvPicPr>
-          <p:cNvPr id="10" name="icon-FaTerminal" descr="C:\Users\Thanam\AppData\Local\Temp\claude\c--Projekt-Trainings-azure-basics-training\a9e0bf4e-0d08-4082-a38a-5b8886538508\scratchpad\pptx\assets\icons\FaTerminal.png">    </p:cNvPr>
+          <p:cNvPr id="10" name="icon-FaTerminal" descr="C:\Users\Thanam\AppData\Local\Temp\claude\c--Projekt-Trainings-azure-basics-training\a7a6b8eb-22f3-4b42-aecc-5af05d1502b1\scratchpad\folien\assets\icons\FaTerminal.png">    </p:cNvPr>
           <p:cNvPicPr>
             <a:picLocks noChangeAspect="1"/>
           </p:cNvPicPr>
@@ -7345,7 +7345,7 @@
       </p:sp>
       <p:pic>
         <p:nvPicPr>
-          <p:cNvPr id="15" name="icon-FaCode" descr="C:\Users\Thanam\AppData\Local\Temp\claude\c--Projekt-Trainings-azure-basics-training\a9e0bf4e-0d08-4082-a38a-5b8886538508\scratchpad\pptx\assets\icons\FaCode.png">    </p:cNvPr>
+          <p:cNvPr id="15" name="icon-FaCode" descr="C:\Users\Thanam\AppData\Local\Temp\claude\c--Projekt-Trainings-azure-basics-training\a7a6b8eb-22f3-4b42-aecc-5af05d1502b1\scratchpad\folien\assets\icons\FaCode.png">    </p:cNvPr>
           <p:cNvPicPr>
             <a:picLocks noChangeAspect="1"/>
           </p:cNvPicPr>
@@ -7498,7 +7498,7 @@
       </p:sp>
       <p:pic>
         <p:nvPicPr>
-          <p:cNvPr id="20" name="icon-FaFileCode" descr="C:\Users\Thanam\AppData\Local\Temp\claude\c--Projekt-Trainings-azure-basics-training\a9e0bf4e-0d08-4082-a38a-5b8886538508\scratchpad\pptx\assets\icons\FaFileCode.png">    </p:cNvPr>
+          <p:cNvPr id="20" name="icon-FaFileCode" descr="C:\Users\Thanam\AppData\Local\Temp\claude\c--Projekt-Trainings-azure-basics-training\a7a6b8eb-22f3-4b42-aecc-5af05d1502b1\scratchpad\folien\assets\icons\FaFileCode.png">    </p:cNvPr>
           <p:cNvPicPr>
             <a:picLocks noChangeAspect="1"/>
           </p:cNvPicPr>
